--- a/FoodLoop-Presentation-Basic.pptx
+++ b/FoodLoop-Presentation-Basic.pptx
@@ -5332,7 +5332,7 @@
                 </a:solidFill>
                 <a:latin typeface="Calibri"/>
               </a:rPr>
-              <a:t>16015024073</a:t>
+              <a:t>16015024070</a:t>
             </a:r>
           </a:p>
         </p:txBody>
